--- a/Class Orientation.pptx
+++ b/Class Orientation.pptx
@@ -667,27 +667,6 @@
           <a:bodyPr/>
           <a:lstStyle/>
           <a:p>
-            <a:r>
-              <a:rPr lang="en-PH" b="1" dirty="0"/>
-              <a:t>You Can End With This</a:t>
-            </a:r>
-          </a:p>
-          <a:p>
-            <a:r>
-              <a:rPr lang="en-PH" dirty="0"/>
-              <a:t>“I am not expecting you to know everything on the first day. My expectation is that you come to class ready to learn, participate, ask questions, and improve. I will do my part as your instructor by teaching and guiding you. I expect you to do your part as students by being responsible for your learning.”</a:t>
-            </a:r>
-          </a:p>
-          <a:p>
-            <a:endParaRPr lang="en-PH" dirty="0"/>
-          </a:p>
-          <a:p>
-            <a:r>
-              <a:rPr lang="en-PH" dirty="0"/>
-              <a:t>What do you expect from me as your instructor?”</a:t>
-            </a:r>
-          </a:p>
-          <a:p>
             <a:endParaRPr lang="en-US" dirty="0"/>
           </a:p>
         </p:txBody>
@@ -778,158 +757,6 @@
           <a:bodyPr/>
           <a:lstStyle/>
           <a:p>
-            <a:pPr marL="0" marR="0" lvl="0" indent="0" algn="l" defTabSz="914400" rtl="0" eaLnBrk="1" fontAlgn="auto" latinLnBrk="0" hangingPunct="1">
-              <a:lnSpc>
-                <a:spcPct val="100000"/>
-              </a:lnSpc>
-              <a:spcBef>
-                <a:spcPts val="0"/>
-              </a:spcBef>
-              <a:spcAft>
-                <a:spcPts val="0"/>
-              </a:spcAft>
-              <a:buClrTx/>
-              <a:buSzTx/>
-              <a:buFontTx/>
-              <a:buNone/>
-              <a:tabLst/>
-              <a:defRPr/>
-            </a:pPr>
-            <a:r>
-              <a:rPr lang="en-PH" sz="1200" b="0" kern="1200" dirty="0">
-                <a:solidFill>
-                  <a:schemeClr val="tx1"/>
-                </a:solidFill>
-                <a:effectLst/>
-                <a:latin typeface="+mn-lt"/>
-                <a:ea typeface="+mn-ea"/>
-                <a:cs typeface="+mn-cs"/>
-              </a:rPr>
-              <a:t>How many mobile applications have you used today?</a:t>
-            </a:r>
-          </a:p>
-          <a:p>
-            <a:pPr marL="0" marR="0" lvl="0" indent="0" algn="l" defTabSz="914400" rtl="0" eaLnBrk="1" fontAlgn="auto" latinLnBrk="0" hangingPunct="1">
-              <a:lnSpc>
-                <a:spcPct val="100000"/>
-              </a:lnSpc>
-              <a:spcBef>
-                <a:spcPts val="0"/>
-              </a:spcBef>
-              <a:spcAft>
-                <a:spcPts val="0"/>
-              </a:spcAft>
-              <a:buClrTx/>
-              <a:buSzTx/>
-              <a:buFontTx/>
-              <a:buNone/>
-              <a:tabLst/>
-              <a:defRPr/>
-            </a:pPr>
-            <a:r>
-              <a:rPr lang="en-PH" sz="1200" b="0" kern="1200" dirty="0">
-                <a:solidFill>
-                  <a:schemeClr val="tx1"/>
-                </a:solidFill>
-                <a:effectLst/>
-                <a:latin typeface="+mn-lt"/>
-                <a:ea typeface="+mn-ea"/>
-                <a:cs typeface="+mn-cs"/>
-              </a:rPr>
-              <a:t>Where do you think these apps store your account information?</a:t>
-            </a:r>
-          </a:p>
-          <a:p>
-            <a:pPr marL="0" marR="0" lvl="0" indent="0" algn="l" defTabSz="914400" rtl="0" eaLnBrk="1" fontAlgn="auto" latinLnBrk="0" hangingPunct="1">
-              <a:lnSpc>
-                <a:spcPct val="100000"/>
-              </a:lnSpc>
-              <a:spcBef>
-                <a:spcPts val="0"/>
-              </a:spcBef>
-              <a:spcAft>
-                <a:spcPts val="0"/>
-              </a:spcAft>
-              <a:buClrTx/>
-              <a:buSzTx/>
-              <a:buFontTx/>
-              <a:buNone/>
-              <a:tabLst/>
-              <a:defRPr/>
-            </a:pPr>
-            <a:r>
-              <a:rPr lang="en-PH" sz="1200" b="0" kern="1200" dirty="0">
-                <a:solidFill>
-                  <a:schemeClr val="tx1"/>
-                </a:solidFill>
-                <a:effectLst/>
-                <a:latin typeface="+mn-lt"/>
-                <a:ea typeface="+mn-ea"/>
-                <a:cs typeface="+mn-cs"/>
-              </a:rPr>
-              <a:t>Every application stores information inside a database.</a:t>
-            </a:r>
-          </a:p>
-          <a:p>
-            <a:endParaRPr lang="en-US" b="0" dirty="0"/>
-          </a:p>
-          <a:p>
-            <a:r>
-              <a:rPr lang="en-PH" sz="1200" b="0" kern="1200" dirty="0">
-                <a:solidFill>
-                  <a:schemeClr val="tx1"/>
-                </a:solidFill>
-                <a:effectLst/>
-                <a:latin typeface="+mn-lt"/>
-                <a:ea typeface="+mn-ea"/>
-                <a:cs typeface="+mn-cs"/>
-              </a:rPr>
-              <a:t>Can Facebook work without a database?</a:t>
-            </a:r>
-          </a:p>
-          <a:p>
-            <a:r>
-              <a:rPr lang="en-PH" sz="1200" b="0" kern="1200" dirty="0">
-                <a:solidFill>
-                  <a:schemeClr val="tx1"/>
-                </a:solidFill>
-                <a:effectLst/>
-                <a:latin typeface="+mn-lt"/>
-                <a:ea typeface="+mn-ea"/>
-                <a:cs typeface="+mn-cs"/>
-              </a:rPr>
-              <a:t>Can banks operate without a database?</a:t>
-            </a:r>
-          </a:p>
-          <a:p>
-            <a:r>
-              <a:rPr lang="en-PH" sz="1200" b="0" kern="1200" dirty="0">
-                <a:solidFill>
-                  <a:schemeClr val="tx1"/>
-                </a:solidFill>
-                <a:effectLst/>
-                <a:latin typeface="+mn-lt"/>
-                <a:ea typeface="+mn-ea"/>
-                <a:cs typeface="+mn-cs"/>
-              </a:rPr>
-              <a:t>Can hospitals still function without databases?</a:t>
-            </a:r>
-          </a:p>
-          <a:p>
-            <a:r>
-              <a:rPr lang="en-PH" sz="1200" b="0" kern="1200" dirty="0">
-                <a:solidFill>
-                  <a:schemeClr val="tx1"/>
-                </a:solidFill>
-                <a:effectLst/>
-                <a:latin typeface="+mn-lt"/>
-                <a:ea typeface="+mn-ea"/>
-                <a:cs typeface="+mn-cs"/>
-              </a:rPr>
-              <a:t>Almost every digital system today depends on databases.</a:t>
-            </a:r>
-          </a:p>
-          <a:p>
             <a:endParaRPr lang="en-US" dirty="0"/>
           </a:p>
         </p:txBody>
@@ -1098,46 +925,6 @@
           <a:bodyPr/>
           <a:lstStyle/>
           <a:p>
-            <a:pPr marL="0" indent="0">
-              <a:lnSpc>
-                <a:spcPct val="130000"/>
-              </a:lnSpc>
-              <a:buNone/>
-            </a:pPr>
-            <a:r>
-              <a:rPr lang="en-US" sz="1200" i="1" dirty="0">
-                <a:solidFill>
-                  <a:srgbClr val="FFFFFF"/>
-                </a:solidFill>
-                <a:latin typeface="Calibri" pitchFamily="34" charset="0"/>
-                <a:ea typeface="Calibri" pitchFamily="34" charset="-122"/>
-                <a:cs typeface="Calibri" pitchFamily="34" charset="-120"/>
-              </a:rPr>
-              <a:t>What are these — words, numbers, facts?</a:t>
-            </a:r>
-            <a:endParaRPr lang="en-US" sz="1200" dirty="0"/>
-          </a:p>
-          <a:p>
-            <a:pPr marL="0" indent="0">
-              <a:lnSpc>
-                <a:spcPct val="130000"/>
-              </a:lnSpc>
-              <a:buNone/>
-            </a:pPr>
-            <a:r>
-              <a:rPr lang="en-US" sz="1200" i="1" dirty="0">
-                <a:solidFill>
-                  <a:srgbClr val="FFFFFF"/>
-                </a:solidFill>
-                <a:latin typeface="Calibri" pitchFamily="34" charset="0"/>
-                <a:ea typeface="Calibri" pitchFamily="34" charset="-122"/>
-                <a:cs typeface="Calibri" pitchFamily="34" charset="-120"/>
-              </a:rPr>
-              <a:t>On their own, they're just pieces of data.</a:t>
-            </a:r>
-            <a:endParaRPr lang="en-US" sz="1200" dirty="0"/>
-          </a:p>
-          <a:p>
             <a:endParaRPr lang="en-US" dirty="0"/>
           </a:p>
         </p:txBody>
@@ -1222,182 +1009,6 @@
           <a:bodyPr/>
           <a:lstStyle/>
           <a:p>
-            <a:r>
-              <a:rPr lang="en-PH" sz="1200" b="0" kern="1200" dirty="0">
-                <a:solidFill>
-                  <a:schemeClr val="tx1"/>
-                </a:solidFill>
-                <a:effectLst/>
-                <a:latin typeface="+mn-lt"/>
-                <a:ea typeface="+mn-ea"/>
-                <a:cs typeface="+mn-cs"/>
-              </a:rPr>
-              <a:t>Everyday Examples</a:t>
-            </a:r>
-          </a:p>
-          <a:p>
-            <a:r>
-              <a:rPr lang="en-PH" sz="1200" b="0" kern="1200" dirty="0">
-                <a:solidFill>
-                  <a:schemeClr val="tx1"/>
-                </a:solidFill>
-                <a:effectLst/>
-                <a:latin typeface="+mn-lt"/>
-                <a:ea typeface="+mn-ea"/>
-                <a:cs typeface="+mn-cs"/>
-              </a:rPr>
-              <a:t>Student ID</a:t>
-            </a:r>
-          </a:p>
-          <a:p>
-            <a:r>
-              <a:rPr lang="en-PH" sz="1200" b="0" kern="1200" dirty="0">
-                <a:solidFill>
-                  <a:schemeClr val="tx1"/>
-                </a:solidFill>
-                <a:effectLst/>
-                <a:latin typeface="+mn-lt"/>
-                <a:ea typeface="+mn-ea"/>
-                <a:cs typeface="+mn-cs"/>
-              </a:rPr>
-              <a:t>Employee Number</a:t>
-            </a:r>
-          </a:p>
-          <a:p>
-            <a:endParaRPr lang="en-PH" sz="1200" b="0" kern="1200" dirty="0">
-              <a:solidFill>
-                <a:schemeClr val="tx1"/>
-              </a:solidFill>
-              <a:effectLst/>
-              <a:latin typeface="+mn-lt"/>
-              <a:ea typeface="+mn-ea"/>
-              <a:cs typeface="+mn-cs"/>
-            </a:endParaRPr>
-          </a:p>
-          <a:p>
-            <a:pPr marL="0" marR="0" lvl="0" indent="0" algn="l" defTabSz="914400" rtl="0" eaLnBrk="1" fontAlgn="auto" latinLnBrk="0" hangingPunct="1">
-              <a:lnSpc>
-                <a:spcPct val="100000"/>
-              </a:lnSpc>
-              <a:spcBef>
-                <a:spcPts val="0"/>
-              </a:spcBef>
-              <a:spcAft>
-                <a:spcPts val="0"/>
-              </a:spcAft>
-              <a:buClrTx/>
-              <a:buSzTx/>
-              <a:buFontTx/>
-              <a:buNone/>
-              <a:tabLst/>
-              <a:defRPr/>
-            </a:pPr>
-            <a:r>
-              <a:rPr lang="en-PH" sz="1200" b="0" kern="1200" dirty="0">
-                <a:solidFill>
-                  <a:schemeClr val="tx1"/>
-                </a:solidFill>
-                <a:effectLst/>
-                <a:latin typeface="+mn-lt"/>
-                <a:ea typeface="+mn-ea"/>
-                <a:cs typeface="+mn-cs"/>
-              </a:rPr>
-              <a:t>Classroom Example ‘Write on the board.’ Maria, 89. </a:t>
-            </a:r>
-          </a:p>
-          <a:p>
-            <a:r>
-              <a:rPr lang="en-PH" sz="1200" b="0" kern="1200" dirty="0">
-                <a:solidFill>
-                  <a:schemeClr val="tx1"/>
-                </a:solidFill>
-                <a:effectLst/>
-                <a:latin typeface="+mn-lt"/>
-                <a:ea typeface="+mn-ea"/>
-                <a:cs typeface="+mn-cs"/>
-              </a:rPr>
-              <a:t>What does 89 mean?</a:t>
-            </a:r>
-          </a:p>
-          <a:p>
-            <a:r>
-              <a:rPr lang="en-PH" sz="1200" b="0" kern="1200" dirty="0">
-                <a:solidFill>
-                  <a:schemeClr val="tx1"/>
-                </a:solidFill>
-                <a:effectLst/>
-                <a:latin typeface="+mn-lt"/>
-                <a:ea typeface="+mn-ea"/>
-                <a:cs typeface="+mn-cs"/>
-              </a:rPr>
-              <a:t>Then write</a:t>
-            </a:r>
-          </a:p>
-          <a:p>
-            <a:r>
-              <a:rPr lang="en-PH" sz="1200" b="0" kern="1200" dirty="0">
-                <a:solidFill>
-                  <a:schemeClr val="tx1"/>
-                </a:solidFill>
-                <a:effectLst/>
-                <a:latin typeface="+mn-lt"/>
-                <a:ea typeface="+mn-ea"/>
-                <a:cs typeface="+mn-cs"/>
-              </a:rPr>
-              <a:t>Maria scored 89 in Database Fundamentals.</a:t>
-            </a:r>
-          </a:p>
-          <a:p>
-            <a:r>
-              <a:rPr lang="en-PH" sz="1200" b="0" kern="1200" dirty="0">
-                <a:solidFill>
-                  <a:schemeClr val="tx1"/>
-                </a:solidFill>
-                <a:effectLst/>
-                <a:latin typeface="+mn-lt"/>
-                <a:ea typeface="+mn-ea"/>
-                <a:cs typeface="+mn-cs"/>
-              </a:rPr>
-              <a:t>Now it becomes meaningful.</a:t>
-            </a:r>
-          </a:p>
-          <a:p>
-            <a:r>
-              <a:rPr lang="en-PH" sz="1200" b="0" kern="1200" dirty="0">
-                <a:solidFill>
-                  <a:schemeClr val="tx1"/>
-                </a:solidFill>
-                <a:effectLst/>
-                <a:latin typeface="+mn-lt"/>
-                <a:ea typeface="+mn-ea"/>
-                <a:cs typeface="+mn-cs"/>
-              </a:rPr>
-              <a:t>Data alone has no context.</a:t>
-            </a:r>
-          </a:p>
-          <a:p>
-            <a:endParaRPr lang="en-PH" sz="1200" b="0" kern="1200" dirty="0">
-              <a:solidFill>
-                <a:schemeClr val="tx1"/>
-              </a:solidFill>
-              <a:effectLst/>
-              <a:latin typeface="+mn-lt"/>
-              <a:ea typeface="+mn-ea"/>
-              <a:cs typeface="+mn-cs"/>
-            </a:endParaRPr>
-          </a:p>
-          <a:p>
-            <a:endParaRPr lang="en-PH" sz="1200" b="0" kern="1200" dirty="0">
-              <a:solidFill>
-                <a:schemeClr val="tx1"/>
-              </a:solidFill>
-              <a:effectLst/>
-              <a:latin typeface="+mn-lt"/>
-              <a:ea typeface="+mn-ea"/>
-              <a:cs typeface="+mn-cs"/>
-            </a:endParaRPr>
-          </a:p>
-          <a:p>
             <a:endParaRPr lang="en-US" dirty="0"/>
           </a:p>
         </p:txBody>
@@ -1482,22 +1093,7 @@
           <a:bodyPr/>
           <a:lstStyle/>
           <a:p>
-            <a:r>
-              <a:rPr lang="en-US" dirty="0"/>
-              <a:t>Vince, 26, BSED</a:t>
-            </a:r>
-          </a:p>
-          <a:p>
-            <a:r>
-              <a:rPr lang="en-US" dirty="0"/>
-              <a:t>Grade 9, 30</a:t>
-            </a:r>
-          </a:p>
-          <a:p>
-            <a:r>
-              <a:rPr lang="en-US" dirty="0"/>
-              <a:t>Ask students to give sample data and ask other to transform it into info</a:t>
-            </a:r>
+            <a:endParaRPr lang="en-US" dirty="0"/>
           </a:p>
         </p:txBody>
       </p:sp>
@@ -1581,76 +1177,6 @@
           <a:bodyPr/>
           <a:lstStyle/>
           <a:p>
-            <a:r>
-              <a:rPr lang="en-PH" sz="1200" b="0" kern="1200" dirty="0">
-                <a:solidFill>
-                  <a:schemeClr val="tx1"/>
-                </a:solidFill>
-                <a:effectLst/>
-                <a:latin typeface="+mn-lt"/>
-                <a:ea typeface="+mn-ea"/>
-                <a:cs typeface="+mn-cs"/>
-              </a:rPr>
-              <a:t>Why is information more useful than raw data?</a:t>
-            </a:r>
-          </a:p>
-          <a:p>
-            <a:r>
-              <a:rPr lang="en-PH" sz="1200" b="0" kern="1200" dirty="0">
-                <a:solidFill>
-                  <a:schemeClr val="tx1"/>
-                </a:solidFill>
-                <a:effectLst/>
-                <a:latin typeface="+mn-lt"/>
-                <a:ea typeface="+mn-ea"/>
-                <a:cs typeface="+mn-cs"/>
-              </a:rPr>
-              <a:t>Ans.</a:t>
-            </a:r>
-          </a:p>
-          <a:p>
-            <a:r>
-              <a:rPr lang="en-PH" sz="1200" b="0" kern="1200" dirty="0">
-                <a:solidFill>
-                  <a:schemeClr val="tx1"/>
-                </a:solidFill>
-                <a:effectLst/>
-                <a:latin typeface="+mn-lt"/>
-                <a:ea typeface="+mn-ea"/>
-                <a:cs typeface="+mn-cs"/>
-              </a:rPr>
-              <a:t>Easy to understand</a:t>
-            </a:r>
-          </a:p>
-          <a:p>
-            <a:r>
-              <a:rPr lang="en-PH" sz="1200" b="0" kern="1200" dirty="0">
-                <a:solidFill>
-                  <a:schemeClr val="tx1"/>
-                </a:solidFill>
-                <a:effectLst/>
-                <a:latin typeface="+mn-lt"/>
-                <a:ea typeface="+mn-ea"/>
-                <a:cs typeface="+mn-cs"/>
-              </a:rPr>
-              <a:t>Can support decision-making</a:t>
-            </a:r>
-          </a:p>
-          <a:p>
-            <a:r>
-              <a:rPr lang="en-PH" sz="1200" b="0" kern="1200" dirty="0">
-                <a:solidFill>
-                  <a:schemeClr val="tx1"/>
-                </a:solidFill>
-                <a:effectLst/>
-                <a:latin typeface="+mn-lt"/>
-                <a:ea typeface="+mn-ea"/>
-                <a:cs typeface="+mn-cs"/>
-              </a:rPr>
-              <a:t>Can be analyzed</a:t>
-            </a:r>
-          </a:p>
-          <a:p>
             <a:endParaRPr lang="en-US" dirty="0"/>
           </a:p>
         </p:txBody>
@@ -2197,34 +1723,6 @@
           <a:bodyPr/>
           <a:lstStyle/>
           <a:p>
-            <a:r>
-              <a:rPr lang="en-PH" sz="1200" b="0" kern="1200" dirty="0">
-                <a:solidFill>
-                  <a:schemeClr val="tx1"/>
-                </a:solidFill>
-                <a:effectLst/>
-                <a:latin typeface="+mn-lt"/>
-                <a:ea typeface="+mn-ea"/>
-                <a:cs typeface="+mn-cs"/>
-              </a:rPr>
-              <a:t>Can we easily search millions of student records using Microsoft Excel?</a:t>
-            </a:r>
-          </a:p>
-          <a:p>
-            <a:r>
-              <a:rPr lang="en-PH" sz="1200" b="0" kern="1200" dirty="0">
-                <a:solidFill>
-                  <a:schemeClr val="tx1"/>
-                </a:solidFill>
-                <a:effectLst/>
-                <a:latin typeface="+mn-lt"/>
-                <a:ea typeface="+mn-ea"/>
-                <a:cs typeface="+mn-cs"/>
-              </a:rPr>
-              <a:t>What if we use MySQL?</a:t>
-            </a:r>
-          </a:p>
-          <a:p>
             <a:endParaRPr lang="en-US" dirty="0"/>
           </a:p>
         </p:txBody>
@@ -2309,134 +1807,6 @@
           <a:bodyPr/>
           <a:lstStyle/>
           <a:p>
-            <a:r>
-              <a:rPr lang="en-PH" sz="1200" b="0" kern="1200" dirty="0">
-                <a:solidFill>
-                  <a:schemeClr val="tx1"/>
-                </a:solidFill>
-                <a:effectLst/>
-                <a:latin typeface="+mn-lt"/>
-                <a:ea typeface="+mn-ea"/>
-                <a:cs typeface="+mn-cs"/>
-              </a:rPr>
-              <a:t>Database = Storage</a:t>
-            </a:r>
-          </a:p>
-          <a:p>
-            <a:r>
-              <a:rPr lang="en-PH" sz="1200" b="0" kern="1200" dirty="0">
-                <a:solidFill>
-                  <a:schemeClr val="tx1"/>
-                </a:solidFill>
-                <a:effectLst/>
-                <a:latin typeface="+mn-lt"/>
-                <a:ea typeface="+mn-ea"/>
-                <a:cs typeface="+mn-cs"/>
-              </a:rPr>
-              <a:t>DBMS = Tool that manages the storage</a:t>
-            </a:r>
-          </a:p>
-          <a:p>
-            <a:r>
-              <a:rPr lang="en-PH" sz="1200" b="1" kern="1200" dirty="0">
-                <a:solidFill>
-                  <a:schemeClr val="tx1"/>
-                </a:solidFill>
-                <a:effectLst/>
-                <a:latin typeface="+mn-lt"/>
-                <a:ea typeface="+mn-ea"/>
-                <a:cs typeface="+mn-cs"/>
-              </a:rPr>
-              <a:t>Database</a:t>
-            </a:r>
-            <a:endParaRPr lang="en-PH" sz="1200" kern="1200" dirty="0">
-              <a:solidFill>
-                <a:schemeClr val="tx1"/>
-              </a:solidFill>
-              <a:effectLst/>
-              <a:latin typeface="+mn-lt"/>
-              <a:ea typeface="+mn-ea"/>
-              <a:cs typeface="+mn-cs"/>
-            </a:endParaRPr>
-          </a:p>
-          <a:p>
-            <a:pPr marL="171450" indent="-171450">
-              <a:buFont typeface="Arial" panose="020B0604020202020204" pitchFamily="34" charset="0"/>
-              <a:buChar char="•"/>
-            </a:pPr>
-            <a:r>
-              <a:rPr lang="en-PH" sz="1200" b="1" kern="1200" dirty="0">
-                <a:solidFill>
-                  <a:schemeClr val="tx1"/>
-                </a:solidFill>
-                <a:effectLst/>
-                <a:latin typeface="+mn-lt"/>
-                <a:ea typeface="+mn-ea"/>
-                <a:cs typeface="+mn-cs"/>
-              </a:rPr>
-              <a:t>A filing cabinet</a:t>
-            </a:r>
-            <a:endParaRPr lang="en-PH" sz="1200" kern="1200" dirty="0">
-              <a:solidFill>
-                <a:schemeClr val="tx1"/>
-              </a:solidFill>
-              <a:effectLst/>
-              <a:latin typeface="+mn-lt"/>
-              <a:ea typeface="+mn-ea"/>
-              <a:cs typeface="+mn-cs"/>
-            </a:endParaRPr>
-          </a:p>
-          <a:p>
-            <a:r>
-              <a:rPr lang="en-PH" sz="1200" b="1" kern="1200" dirty="0">
-                <a:solidFill>
-                  <a:schemeClr val="tx1"/>
-                </a:solidFill>
-                <a:effectLst/>
-                <a:latin typeface="+mn-lt"/>
-                <a:ea typeface="+mn-ea"/>
-                <a:cs typeface="+mn-cs"/>
-              </a:rPr>
-              <a:t>DBMS</a:t>
-            </a:r>
-            <a:endParaRPr lang="en-PH" sz="1200" kern="1200" dirty="0">
-              <a:solidFill>
-                <a:schemeClr val="tx1"/>
-              </a:solidFill>
-              <a:effectLst/>
-              <a:latin typeface="+mn-lt"/>
-              <a:ea typeface="+mn-ea"/>
-              <a:cs typeface="+mn-cs"/>
-            </a:endParaRPr>
-          </a:p>
-          <a:p>
-            <a:pPr marL="171450" indent="-171450">
-              <a:buFont typeface="Arial" panose="020B0604020202020204" pitchFamily="34" charset="0"/>
-              <a:buChar char="•"/>
-            </a:pPr>
-            <a:r>
-              <a:rPr lang="en-PH" sz="1200" b="1" kern="1200" dirty="0">
-                <a:solidFill>
-                  <a:schemeClr val="tx1"/>
-                </a:solidFill>
-                <a:effectLst/>
-                <a:latin typeface="+mn-lt"/>
-                <a:ea typeface="+mn-ea"/>
-                <a:cs typeface="+mn-cs"/>
-              </a:rPr>
-              <a:t>The office staff managing the cabinet</a:t>
-            </a:r>
-            <a:endParaRPr lang="en-PH" sz="1200" kern="1200" dirty="0">
-              <a:solidFill>
-                <a:schemeClr val="tx1"/>
-              </a:solidFill>
-              <a:effectLst/>
-              <a:latin typeface="+mn-lt"/>
-              <a:ea typeface="+mn-ea"/>
-              <a:cs typeface="+mn-cs"/>
-            </a:endParaRPr>
-          </a:p>
-          <a:p>
             <a:endParaRPr lang="en-US" dirty="0"/>
           </a:p>
         </p:txBody>
@@ -2940,18 +2310,6 @@
         <p:txBody>
           <a:bodyPr/>
           <a:lstStyle/>
-          <a:p>
-            <a:r>
-              <a:rPr lang="en-PH" dirty="0"/>
-              <a:t>Vision: Where does ISUFST want to be in the future? Vision is the destination</a:t>
-            </a:r>
-          </a:p>
-          <a:p>
-            <a:r>
-              <a:rPr lang="en-PH" dirty="0"/>
-              <a:t> Mission: How will the university achieve its vision?</a:t>
-            </a:r>
-          </a:p>
           <a:p>
             <a:endParaRPr lang="en-US" dirty="0"/>
           </a:p>
@@ -3564,29 +2922,6 @@
         <p:txBody>
           <a:bodyPr/>
           <a:lstStyle/>
-          <a:p>
-            <a:pPr marL="0" marR="0" lvl="0" indent="0" algn="l" defTabSz="914400" rtl="0" eaLnBrk="1" fontAlgn="auto" latinLnBrk="0" hangingPunct="1">
-              <a:lnSpc>
-                <a:spcPct val="100000"/>
-              </a:lnSpc>
-              <a:spcBef>
-                <a:spcPts val="0"/>
-              </a:spcBef>
-              <a:spcAft>
-                <a:spcPts val="0"/>
-              </a:spcAft>
-              <a:buClrTx/>
-              <a:buSzTx/>
-              <a:buFontTx/>
-              <a:buNone/>
-              <a:tabLst/>
-              <a:defRPr/>
-            </a:pPr>
-            <a:r>
-              <a:rPr lang="en-PH" dirty="0"/>
-              <a:t>The university promises to provide quality education while continuously improving its services and satisfying students and stakeholders.</a:t>
-            </a:r>
-          </a:p>
           <a:p>
             <a:endParaRPr lang="en-US" dirty="0"/>
           </a:p>
